--- a/word-drafts/figures/Vision-Fig1-Architecture.pptx
+++ b/word-drafts/figures/Vision-Fig1-Architecture.pptx
@@ -4696,7 +4696,7 @@
         <p:spPr>
           <a:xfrm>
             <a:off x="9096375" y="4486275"/>
-            <a:ext cx="333375" cy="123825"/>
+            <a:ext cx="400050" cy="123825"/>
           </a:xfrm>
           <a:prstGeom prst="rect">
             <a:avLst/>
@@ -4958,7 +4958,7 @@
         <p:spPr>
           <a:xfrm>
             <a:off x="7167562" y="5457825"/>
-            <a:ext cx="552450" cy="123825"/>
+            <a:ext cx="733425" cy="123825"/>
           </a:xfrm>
           <a:prstGeom prst="rect">
             <a:avLst/>
